--- a/docs/Benefits-AgentCore-Customer.pptx
+++ b/docs/Benefits-AgentCore-Customer.pptx
@@ -2424,7 +2424,7 @@
                 <a:ea typeface="Calibri" pitchFamily="34" charset="-122"/>
                 <a:cs typeface="Calibri" pitchFamily="34" charset="-120"/>
               </a:rPr>
-              <a:t>Walk your program, privacy, and security teams through the architecture and the live 21-check proof.</a:t>
+              <a:t>Walk your program, privacy, and security teams through the architecture and the live 28-check proof.</a:t>
             </a:r>
             <a:endParaRPr lang="en-US" sz="1230" dirty="0"/>
           </a:p>
@@ -8946,7 +8946,7 @@
                 <a:ea typeface="Cambria" pitchFamily="34" charset="-122"/>
                 <a:cs typeface="Cambria" pitchFamily="34" charset="-120"/>
               </a:rPr>
-              <a:t>21/21</a:t>
+              <a:t>28/28</a:t>
             </a:r>
             <a:endParaRPr lang="en-US" sz="3200" dirty="0"/>
           </a:p>

--- a/docs/Benefits-AgentCore-Customer.pptx
+++ b/docs/Benefits-AgentCore-Customer.pptx
@@ -2424,7 +2424,7 @@
                 <a:ea typeface="Calibri" pitchFamily="34" charset="-122"/>
                 <a:cs typeface="Calibri" pitchFamily="34" charset="-120"/>
               </a:rPr>
-              <a:t>Walk your program, privacy, and security teams through the architecture and the live 28-check proof.</a:t>
+              <a:t>Walk your program, privacy, and security teams through the architecture and the live 29-check proof.</a:t>
             </a:r>
             <a:endParaRPr lang="en-US" sz="1230" dirty="0"/>
           </a:p>
@@ -8946,7 +8946,7 @@
                 <a:ea typeface="Cambria" pitchFamily="34" charset="-122"/>
                 <a:cs typeface="Cambria" pitchFamily="34" charset="-120"/>
               </a:rPr>
-              <a:t>28/28</a:t>
+              <a:t>29/29</a:t>
             </a:r>
             <a:endParaRPr lang="en-US" sz="3200" dirty="0"/>
           </a:p>
